--- a/docs/adr-033-decks/mentible-for-security-architects.pptx
+++ b/docs/adr-033-decks/mentible-for-security-architects.pptx
@@ -7572,7 +7572,7 @@
                 </a:solidFill>
                 <a:latin typeface="Georgia"/>
               </a:rPr>
-              <a:t>No sign-up. Nothing leaves your machine.</a:t>
+              <a:t>No sign-up. Start on your own machine.</a:t>
             </a:r>
           </a:p>
         </p:txBody>
@@ -7611,7 +7611,7 @@
                 </a:solidFill>
                 <a:latin typeface="Calibri"/>
               </a:rPr>
-              <a:t>Install me, point me at your security library, and we start — everything stays on your own machine.</a:t>
+              <a:t>Install me, point me at your security library, and we start — your library stays on your own machine.</a:t>
             </a:r>
           </a:p>
         </p:txBody>
@@ -8202,16 +8202,16 @@
                 </a:solidFill>
                 <a:latin typeface="Consolas"/>
               </a:rPr>
-              <a:t>✓ On the free tier I live entirely on your machine. </a:t>
+              <a:t>✓ Free tier: retrieval is 100% on-device. </a:t>
             </a:r>
             <a:r>
-              <a:rPr sz="1250" b="0" i="0">
+              <a:rPr sz="1100" b="0" i="0">
                 <a:solidFill>
                   <a:srgbClr val="E8ECF6"/>
                 </a:solidFill>
                 <a:latin typeface="Calibri"/>
               </a:rPr>
-              <a:t>I can't see your library — and neither can anyone else.</a:t>
+              <a:t>When you ask me to write, your excerpts go to the model provider you choose (BYOK) — you see the destination first.</a:t>
             </a:r>
           </a:p>
         </p:txBody>
@@ -15852,8 +15852,8 @@
         </p:nvSpPr>
         <p:spPr>
           <a:xfrm>
-            <a:off x="1280160" y="4526280"/>
-            <a:ext cx="9601200" cy="320040"/>
+            <a:off x="1280160" y="4480560"/>
+            <a:ext cx="9601200" cy="457200"/>
           </a:xfrm>
           <a:prstGeom prst="rect">
             <a:avLst/>
@@ -15867,10 +15867,22 @@
           <a:lstStyle/>
           <a:p>
             <a:pPr algn="l">
+              <a:lnSpc>
+                <a:spcPct val="105000"/>
+              </a:lnSpc>
               <a:spcAft>
                 <a:spcPts val="0"/>
               </a:spcAft>
             </a:pPr>
+            <a:r>
+              <a:rPr sz="1050" b="1" i="0">
+                <a:solidFill>
+                  <a:srgbClr val="58C2D6"/>
+                </a:solidFill>
+                <a:latin typeface="Consolas"/>
+              </a:rPr>
+              <a:t>// honest posture: </a:t>
+            </a:r>
             <a:r>
               <a:rPr sz="1050" b="0" i="1">
                 <a:solidFill>
@@ -15878,7 +15890,7 @@
                 </a:solidFill>
                 <a:latin typeface="Calibri"/>
               </a:rPr>
-              <a:t>Upgrading makes me a private hosted library that follows you. The free device-only version stays as it is.</a:t>
+              <a:t>generation sends your excerpts to a named model provider (BYOK or managed, under a no-train DPA); the hosted tier is access-controlled but not zero-knowledge. Free device-only version stays as it is.</a:t>
             </a:r>
           </a:p>
         </p:txBody>

--- a/docs/adr-033-decks/mentible-for-security-architects.pptx
+++ b/docs/adr-033-decks/mentible-for-security-architects.pptx
@@ -4716,6 +4716,102 @@
                 <a:latin typeface="Consolas"/>
               </a:rPr>
               <a:t>   software security architect</a:t>
+            </a:r>
+          </a:p>
+        </p:txBody>
+      </p:sp>
+      <p:sp>
+        <p:nvSpPr>
+          <p:cNvPr id="45" name="Rounded Rectangle 44"/>
+          <p:cNvSpPr/>
+          <p:nvPr/>
+        </p:nvSpPr>
+        <p:spPr>
+          <a:xfrm>
+            <a:off x="822960" y="6172200"/>
+            <a:ext cx="10515600" cy="502920"/>
+          </a:xfrm>
+          <a:prstGeom prst="roundRect">
+            <a:avLst>
+              <a:gd name="adj" fmla="val 30000"/>
+            </a:avLst>
+          </a:prstGeom>
+          <a:solidFill>
+            <a:srgbClr val="1E2A45"/>
+          </a:solidFill>
+          <a:ln w="12700">
+            <a:solidFill>
+              <a:srgbClr val="58C2D6"/>
+            </a:solidFill>
+          </a:ln>
+          <a:effectLst/>
+        </p:spPr>
+        <p:style>
+          <a:lnRef idx="1">
+            <a:schemeClr val="accent1"/>
+          </a:lnRef>
+          <a:fillRef idx="3">
+            <a:schemeClr val="accent1"/>
+          </a:fillRef>
+          <a:effectRef idx="2">
+            <a:schemeClr val="accent1"/>
+          </a:effectRef>
+          <a:fontRef idx="minor">
+            <a:schemeClr val="lt1"/>
+          </a:fontRef>
+        </p:style>
+        <p:txBody>
+          <a:bodyPr rtlCol="0" anchor="ctr"/>
+          <a:lstStyle/>
+          <a:p>
+            <a:pPr algn="ctr"/>
+          </a:p>
+        </p:txBody>
+      </p:sp>
+      <p:sp>
+        <p:nvSpPr>
+          <p:cNvPr id="46" name="TextBox 45"/>
+          <p:cNvSpPr txBox="1"/>
+          <p:nvPr/>
+        </p:nvSpPr>
+        <p:spPr>
+          <a:xfrm>
+            <a:off x="1051560" y="6172200"/>
+            <a:ext cx="10058400" cy="502920"/>
+          </a:xfrm>
+          <a:prstGeom prst="rect">
+            <a:avLst/>
+          </a:prstGeom>
+          <a:noFill/>
+        </p:spPr>
+        <p:txBody>
+          <a:bodyPr wrap="square" anchor="ctr" lIns="0" rIns="0" tIns="0" bIns="0">
+            <a:spAutoFit/>
+          </a:bodyPr>
+          <a:lstStyle/>
+          <a:p>
+            <a:pPr algn="l">
+              <a:spcAft>
+                <a:spcPts val="0"/>
+              </a:spcAft>
+            </a:pPr>
+            <a:r>
+              <a:rPr sz="1050" b="1" i="0">
+                <a:solidFill>
+                  <a:srgbClr val="58C2D6"/>
+                </a:solidFill>
+                <a:latin typeface="Consolas"/>
+              </a:rPr>
+              <a:t>// PRODUCT VISION — </a:t>
+            </a:r>
+            <a:r>
+              <a:rPr sz="1050" b="0" i="0">
+                <a:solidFill>
+                  <a:srgbClr val="E8ECF6"/>
+                </a:solidFill>
+                <a:latin typeface="Calibri"/>
+              </a:rPr>
+              <a:t>a preview of where Mentible is headed. The grounded AI and private hosted sync shown here are on the roadmap (ADR-029/033), not yet shipped.</a:t>
             </a:r>
           </a:p>
         </p:txBody>
